--- a/slides/ApexMind-BCU-AI-Hackathon-2026.pptx
+++ b/slides/ApexMind-BCU-AI-Hackathon-2026.pptx
@@ -16,13 +16,17 @@
   <p:notesSz cx="5143500" cy="9144000"/>
   <p:embeddedFontLst>
     <p:embeddedFont>
+      <p:font typeface="Alexandria Light" pitchFamily="2" charset="-78"/>
+      <p:regular r:id="rId6"/>
+    </p:embeddedFont>
+    <p:embeddedFont>
       <p:font typeface="Alexandria SemiBold" pitchFamily="2" charset="-78"/>
-      <p:regular r:id="rId6"/>
-      <p:bold r:id="rId7"/>
+      <p:regular r:id="rId7"/>
+      <p:bold r:id="rId8"/>
     </p:embeddedFont>
     <p:embeddedFont>
       <p:font typeface="Sora Light" pitchFamily="2" charset="0"/>
-      <p:regular r:id="rId8"/>
+      <p:regular r:id="rId9"/>
     </p:embeddedFont>
   </p:embeddedFontLst>
   <p:defaultTextStyle>
@@ -150,7 +154,7 @@
     </p:spTree>
     <p:extLst>
       <p:ext uri="{BB962C8B-B14F-4D97-AF65-F5344CB8AC3E}">
-        <p14:creationId xmlns:p14="http://schemas.microsoft.com/office/powerpoint/2010/main" val="3085665313"/>
+        <p14:creationId xmlns:p14="http://schemas.microsoft.com/office/powerpoint/2010/main" val="499583496"/>
       </p:ext>
     </p:extLst>
   </p:cSld>
@@ -636,12 +640,9 @@
 <p:sldMaster xmlns:a="http://schemas.openxmlformats.org/drawingml/2006/main" xmlns:r="http://schemas.openxmlformats.org/officeDocument/2006/relationships" xmlns:p="http://schemas.openxmlformats.org/presentationml/2006/main">
   <p:cSld>
     <p:bg>
-      <p:bgPr>
-        <a:solidFill>
-          <a:schemeClr val="bg1"/>
-        </a:solidFill>
-        <a:effectLst/>
-      </p:bgPr>
+      <p:bgRef idx="1001">
+        <a:schemeClr val="bg1"/>
+      </p:bgRef>
     </p:bg>
     <p:spTree>
       <p:nvGrpSpPr>
@@ -1486,8 +1487,8 @@
         </p:nvSpPr>
         <p:spPr>
           <a:xfrm>
-            <a:off x="473943" y="382116"/>
-            <a:ext cx="3742283" cy="410617"/>
+            <a:off x="473943" y="1098872"/>
+            <a:ext cx="4020666" cy="445443"/>
           </a:xfrm>
           <a:prstGeom prst="rect">
             <a:avLst/>
@@ -1506,7 +1507,7 @@
               <a:buNone/>
             </a:pPr>
             <a:r>
-              <a:rPr lang="en-US" sz="2550" dirty="0">
+              <a:rPr lang="en-US" sz="2800" dirty="0">
                 <a:solidFill>
                   <a:srgbClr val="1F1E1E"/>
                 </a:solidFill>
@@ -1516,28 +1517,68 @@
               </a:rPr>
               <a:t>Method</a:t>
             </a:r>
-            <a:endParaRPr lang="en-US" sz="2550" dirty="0"/>
-          </a:p>
-        </p:txBody>
-      </p:sp>
-      <p:sp>
-        <p:nvSpPr>
-          <p:cNvPr id="3" name="Shape 1"/>
-          <p:cNvSpPr/>
-          <p:nvPr/>
-        </p:nvSpPr>
-        <p:spPr>
-          <a:xfrm>
-            <a:off x="473943" y="1022896"/>
-            <a:ext cx="1138461" cy="228377"/>
-          </a:xfrm>
-          <a:prstGeom prst="roundRect">
-            <a:avLst>
-              <a:gd name="adj" fmla="val 18366"/>
-            </a:avLst>
+            <a:endParaRPr lang="en-US" sz="2800" dirty="0"/>
+          </a:p>
+        </p:txBody>
+      </p:sp>
+      <p:sp>
+        <p:nvSpPr>
+          <p:cNvPr id="3" name="Text 1"/>
+          <p:cNvSpPr/>
+          <p:nvPr/>
+        </p:nvSpPr>
+        <p:spPr>
+          <a:xfrm>
+            <a:off x="473943" y="1815108"/>
+            <a:ext cx="270793" cy="169218"/>
+          </a:xfrm>
+          <a:prstGeom prst="rect">
+            <a:avLst/>
+          </a:prstGeom>
+          <a:noFill/>
+          <a:ln/>
+        </p:spPr>
+        <p:txBody>
+          <a:bodyPr wrap="none" lIns="0" tIns="0" rIns="0" bIns="0" rtlCol="0" anchor="ctr"/>
+          <a:lstStyle/>
+          <a:p>
+            <a:pPr marL="0" indent="0" algn="l">
+              <a:lnSpc>
+                <a:spcPct val="100000"/>
+              </a:lnSpc>
+              <a:buNone/>
+            </a:pPr>
+            <a:r>
+              <a:rPr lang="en-US" sz="1050" dirty="0">
+                <a:solidFill>
+                  <a:srgbClr val="3B3535"/>
+                </a:solidFill>
+                <a:latin typeface="Alexandria Light" pitchFamily="34" charset="0"/>
+                <a:ea typeface="Alexandria Light" pitchFamily="34" charset="-122"/>
+                <a:cs typeface="Alexandria Light" pitchFamily="34" charset="-120"/>
+              </a:rPr>
+              <a:t>01</a:t>
+            </a:r>
+            <a:endParaRPr lang="en-US" sz="1050" dirty="0"/>
+          </a:p>
+        </p:txBody>
+      </p:sp>
+      <p:sp>
+        <p:nvSpPr>
+          <p:cNvPr id="4" name="Shape 2"/>
+          <p:cNvSpPr/>
+          <p:nvPr/>
+        </p:nvSpPr>
+        <p:spPr>
+          <a:xfrm>
+            <a:off x="473943" y="2026072"/>
+            <a:ext cx="4030340" cy="19050"/>
+          </a:xfrm>
+          <a:prstGeom prst="rect">
+            <a:avLst/>
           </a:prstGeom>
           <a:solidFill>
-            <a:srgbClr val="D5DCF6"/>
+            <a:srgbClr val="1A2D7A"/>
           </a:solidFill>
           <a:ln/>
         </p:spPr>
@@ -1551,14 +1592,14 @@
       </p:sp>
       <p:sp>
         <p:nvSpPr>
-          <p:cNvPr id="4" name="Text 2"/>
-          <p:cNvSpPr/>
-          <p:nvPr/>
-        </p:nvSpPr>
-        <p:spPr>
-          <a:xfrm>
-            <a:off x="548804" y="1060326"/>
-            <a:ext cx="1445940" cy="153516"/>
+          <p:cNvPr id="5" name="Text 3"/>
+          <p:cNvSpPr/>
+          <p:nvPr/>
+        </p:nvSpPr>
+        <p:spPr>
+          <a:xfrm>
+            <a:off x="473943" y="2131814"/>
+            <a:ext cx="1781696" cy="222647"/>
           </a:xfrm>
           <a:prstGeom prst="rect">
             <a:avLst/>
@@ -1572,12 +1613,54 @@
           <a:p>
             <a:pPr marL="0" indent="0" algn="l">
               <a:lnSpc>
-                <a:spcPct val="128000"/>
+                <a:spcPct val="104000"/>
               </a:lnSpc>
               <a:buNone/>
             </a:pPr>
             <a:r>
-              <a:rPr lang="en-US" sz="750" dirty="0">
+              <a:rPr lang="en-US" sz="1400" dirty="0">
+                <a:solidFill>
+                  <a:srgbClr val="3B3535"/>
+                </a:solidFill>
+                <a:latin typeface="Alexandria SemiBold" pitchFamily="34" charset="0"/>
+                <a:ea typeface="Alexandria SemiBold" pitchFamily="34" charset="-122"/>
+                <a:cs typeface="Alexandria SemiBold" pitchFamily="34" charset="-120"/>
+              </a:rPr>
+              <a:t>Evidence Source</a:t>
+            </a:r>
+            <a:endParaRPr lang="en-US" sz="1400" dirty="0"/>
+          </a:p>
+        </p:txBody>
+      </p:sp>
+      <p:sp>
+        <p:nvSpPr>
+          <p:cNvPr id="6" name="Text 4"/>
+          <p:cNvSpPr/>
+          <p:nvPr/>
+        </p:nvSpPr>
+        <p:spPr>
+          <a:xfrm>
+            <a:off x="473943" y="2435647"/>
+            <a:ext cx="4030340" cy="216694"/>
+          </a:xfrm>
+          <a:prstGeom prst="rect">
+            <a:avLst/>
+          </a:prstGeom>
+          <a:noFill/>
+          <a:ln/>
+        </p:spPr>
+        <p:txBody>
+          <a:bodyPr wrap="none" lIns="0" tIns="0" rIns="0" bIns="0" rtlCol="0" anchor="t"/>
+          <a:lstStyle/>
+          <a:p>
+            <a:pPr marL="0" indent="0" algn="l">
+              <a:lnSpc>
+                <a:spcPct val="133000"/>
+              </a:lnSpc>
+              <a:buNone/>
+            </a:pPr>
+            <a:r>
+              <a:rPr lang="en-US" sz="1050" dirty="0">
                 <a:solidFill>
                   <a:srgbClr val="3B3535"/>
                 </a:solidFill>
@@ -1585,22 +1668,91 @@
                 <a:ea typeface="Sora Light" pitchFamily="34" charset="-122"/>
                 <a:cs typeface="Sora Light" pitchFamily="34" charset="-120"/>
               </a:rPr>
-              <a:t>EVIDENCE SOURCE</a:t>
-            </a:r>
-            <a:endParaRPr lang="en-US" sz="750" dirty="0"/>
-          </a:p>
-        </p:txBody>
-      </p:sp>
-      <p:sp>
-        <p:nvSpPr>
-          <p:cNvPr id="5" name="Text 3"/>
-          <p:cNvSpPr/>
-          <p:nvPr/>
-        </p:nvSpPr>
-        <p:spPr>
-          <a:xfrm>
-            <a:off x="473943" y="1380679"/>
-            <a:ext cx="8653314" cy="191914"/>
+              <a:t>Wikipedia primary + DuckDuckGo supplement</a:t>
+            </a:r>
+            <a:endParaRPr lang="en-US" sz="1050" dirty="0"/>
+          </a:p>
+        </p:txBody>
+      </p:sp>
+      <p:sp>
+        <p:nvSpPr>
+          <p:cNvPr id="7" name="Text 5"/>
+          <p:cNvSpPr/>
+          <p:nvPr/>
+        </p:nvSpPr>
+        <p:spPr>
+          <a:xfrm>
+            <a:off x="4639642" y="1815108"/>
+            <a:ext cx="270793" cy="169218"/>
+          </a:xfrm>
+          <a:prstGeom prst="rect">
+            <a:avLst/>
+          </a:prstGeom>
+          <a:noFill/>
+          <a:ln/>
+        </p:spPr>
+        <p:txBody>
+          <a:bodyPr wrap="none" lIns="0" tIns="0" rIns="0" bIns="0" rtlCol="0" anchor="ctr"/>
+          <a:lstStyle/>
+          <a:p>
+            <a:pPr marL="0" indent="0" algn="l">
+              <a:lnSpc>
+                <a:spcPct val="100000"/>
+              </a:lnSpc>
+              <a:buNone/>
+            </a:pPr>
+            <a:r>
+              <a:rPr lang="en-US" sz="1050" dirty="0">
+                <a:solidFill>
+                  <a:srgbClr val="3B3535"/>
+                </a:solidFill>
+                <a:latin typeface="Alexandria Light" pitchFamily="34" charset="0"/>
+                <a:ea typeface="Alexandria Light" pitchFamily="34" charset="-122"/>
+                <a:cs typeface="Alexandria Light" pitchFamily="34" charset="-120"/>
+              </a:rPr>
+              <a:t>02</a:t>
+            </a:r>
+            <a:endParaRPr lang="en-US" sz="1050" dirty="0"/>
+          </a:p>
+        </p:txBody>
+      </p:sp>
+      <p:sp>
+        <p:nvSpPr>
+          <p:cNvPr id="8" name="Shape 6"/>
+          <p:cNvSpPr/>
+          <p:nvPr/>
+        </p:nvSpPr>
+        <p:spPr>
+          <a:xfrm>
+            <a:off x="4639642" y="2026072"/>
+            <a:ext cx="4030414" cy="19050"/>
+          </a:xfrm>
+          <a:prstGeom prst="rect">
+            <a:avLst/>
+          </a:prstGeom>
+          <a:solidFill>
+            <a:srgbClr val="1A2D7A"/>
+          </a:solidFill>
+          <a:ln/>
+        </p:spPr>
+        <p:txBody>
+          <a:bodyPr/>
+          <a:lstStyle/>
+          <a:p>
+            <a:endParaRPr lang="en-US"/>
+          </a:p>
+        </p:txBody>
+      </p:sp>
+      <p:sp>
+        <p:nvSpPr>
+          <p:cNvPr id="9" name="Text 7"/>
+          <p:cNvSpPr/>
+          <p:nvPr/>
+        </p:nvSpPr>
+        <p:spPr>
+          <a:xfrm>
+            <a:off x="4639642" y="2131814"/>
+            <a:ext cx="2933551" cy="222647"/>
           </a:xfrm>
           <a:prstGeom prst="rect">
             <a:avLst/>
@@ -1614,12 +1766,54 @@
           <a:p>
             <a:pPr marL="0" indent="0" algn="l">
               <a:lnSpc>
-                <a:spcPct val="128000"/>
+                <a:spcPct val="104000"/>
               </a:lnSpc>
               <a:buNone/>
             </a:pPr>
             <a:r>
-              <a:rPr lang="en-US" sz="950" dirty="0">
+              <a:rPr lang="en-US" sz="1400" dirty="0">
+                <a:solidFill>
+                  <a:srgbClr val="3B3535"/>
+                </a:solidFill>
+                <a:latin typeface="Alexandria SemiBold" pitchFamily="34" charset="0"/>
+                <a:ea typeface="Alexandria SemiBold" pitchFamily="34" charset="-122"/>
+                <a:cs typeface="Alexandria SemiBold" pitchFamily="34" charset="-120"/>
+              </a:rPr>
+              <a:t>Embedding / Retrieval / Ranking</a:t>
+            </a:r>
+            <a:endParaRPr lang="en-US" sz="1400" dirty="0"/>
+          </a:p>
+        </p:txBody>
+      </p:sp>
+      <p:sp>
+        <p:nvSpPr>
+          <p:cNvPr id="10" name="Text 8"/>
+          <p:cNvSpPr/>
+          <p:nvPr/>
+        </p:nvSpPr>
+        <p:spPr>
+          <a:xfrm>
+            <a:off x="4639642" y="2435647"/>
+            <a:ext cx="4030414" cy="216694"/>
+          </a:xfrm>
+          <a:prstGeom prst="rect">
+            <a:avLst/>
+          </a:prstGeom>
+          <a:noFill/>
+          <a:ln/>
+        </p:spPr>
+        <p:txBody>
+          <a:bodyPr wrap="none" lIns="0" tIns="0" rIns="0" bIns="0" rtlCol="0" anchor="t"/>
+          <a:lstStyle/>
+          <a:p>
+            <a:pPr marL="0" indent="0" algn="l">
+              <a:lnSpc>
+                <a:spcPct val="133000"/>
+              </a:lnSpc>
+              <a:buNone/>
+            </a:pPr>
+            <a:r>
+              <a:rPr lang="en-US" sz="1050" dirty="0">
                 <a:solidFill>
                   <a:srgbClr val="3B3535"/>
                 </a:solidFill>
@@ -1627,30 +1821,70 @@
                 <a:ea typeface="Sora Light" pitchFamily="34" charset="-122"/>
                 <a:cs typeface="Sora Light" pitchFamily="34" charset="-120"/>
               </a:rPr>
-              <a:t>English Wikipedia via MediaWiki API (questions phrased "according to Wikipedia"), with DuckDuckGo web results as supplement.</a:t>
-            </a:r>
-            <a:endParaRPr lang="en-US" sz="950" dirty="0"/>
-          </a:p>
-        </p:txBody>
-      </p:sp>
-      <p:sp>
-        <p:nvSpPr>
-          <p:cNvPr id="6" name="Shape 4"/>
-          <p:cNvSpPr/>
-          <p:nvPr/>
-        </p:nvSpPr>
-        <p:spPr>
-          <a:xfrm>
-            <a:off x="473943" y="1701998"/>
-            <a:ext cx="1972717" cy="228377"/>
-          </a:xfrm>
-          <a:prstGeom prst="roundRect">
-            <a:avLst>
-              <a:gd name="adj" fmla="val 18366"/>
-            </a:avLst>
+              <a:t>Entity queries → cached retrieval → rerank → top passages</a:t>
+            </a:r>
+            <a:endParaRPr lang="en-US" sz="1050" dirty="0"/>
+          </a:p>
+        </p:txBody>
+      </p:sp>
+      <p:sp>
+        <p:nvSpPr>
+          <p:cNvPr id="11" name="Text 9"/>
+          <p:cNvSpPr/>
+          <p:nvPr/>
+        </p:nvSpPr>
+        <p:spPr>
+          <a:xfrm>
+            <a:off x="473943" y="2889200"/>
+            <a:ext cx="270793" cy="169218"/>
+          </a:xfrm>
+          <a:prstGeom prst="rect">
+            <a:avLst/>
+          </a:prstGeom>
+          <a:noFill/>
+          <a:ln/>
+        </p:spPr>
+        <p:txBody>
+          <a:bodyPr wrap="none" lIns="0" tIns="0" rIns="0" bIns="0" rtlCol="0" anchor="ctr"/>
+          <a:lstStyle/>
+          <a:p>
+            <a:pPr marL="0" indent="0" algn="l">
+              <a:lnSpc>
+                <a:spcPct val="100000"/>
+              </a:lnSpc>
+              <a:buNone/>
+            </a:pPr>
+            <a:r>
+              <a:rPr lang="en-US" sz="1050" dirty="0">
+                <a:solidFill>
+                  <a:srgbClr val="3B3535"/>
+                </a:solidFill>
+                <a:latin typeface="Alexandria Light" pitchFamily="34" charset="0"/>
+                <a:ea typeface="Alexandria Light" pitchFamily="34" charset="-122"/>
+                <a:cs typeface="Alexandria Light" pitchFamily="34" charset="-120"/>
+              </a:rPr>
+              <a:t>03</a:t>
+            </a:r>
+            <a:endParaRPr lang="en-US" sz="1050" dirty="0"/>
+          </a:p>
+        </p:txBody>
+      </p:sp>
+      <p:sp>
+        <p:nvSpPr>
+          <p:cNvPr id="12" name="Shape 10"/>
+          <p:cNvSpPr/>
+          <p:nvPr/>
+        </p:nvSpPr>
+        <p:spPr>
+          <a:xfrm>
+            <a:off x="473943" y="3100164"/>
+            <a:ext cx="4030340" cy="19050"/>
+          </a:xfrm>
+          <a:prstGeom prst="rect">
+            <a:avLst/>
           </a:prstGeom>
           <a:solidFill>
-            <a:srgbClr val="D5DCF6"/>
+            <a:srgbClr val="1A2D7A"/>
           </a:solidFill>
           <a:ln/>
         </p:spPr>
@@ -1664,14 +1898,14 @@
       </p:sp>
       <p:sp>
         <p:nvSpPr>
-          <p:cNvPr id="7" name="Text 5"/>
-          <p:cNvSpPr/>
-          <p:nvPr/>
-        </p:nvSpPr>
-        <p:spPr>
-          <a:xfrm>
-            <a:off x="548804" y="1739429"/>
-            <a:ext cx="2280196" cy="153516"/>
+          <p:cNvPr id="13" name="Text 11"/>
+          <p:cNvSpPr/>
+          <p:nvPr/>
+        </p:nvSpPr>
+        <p:spPr>
+          <a:xfrm>
+            <a:off x="473943" y="3205907"/>
+            <a:ext cx="1790254" cy="222647"/>
           </a:xfrm>
           <a:prstGeom prst="rect">
             <a:avLst/>
@@ -1685,12 +1919,54 @@
           <a:p>
             <a:pPr marL="0" indent="0" algn="l">
               <a:lnSpc>
-                <a:spcPct val="128000"/>
+                <a:spcPct val="104000"/>
               </a:lnSpc>
               <a:buNone/>
             </a:pPr>
             <a:r>
-              <a:rPr lang="en-US" sz="750" dirty="0">
+              <a:rPr lang="en-US" sz="1400" dirty="0">
+                <a:solidFill>
+                  <a:srgbClr val="3B3535"/>
+                </a:solidFill>
+                <a:latin typeface="Alexandria SemiBold" pitchFamily="34" charset="0"/>
+                <a:ea typeface="Alexandria SemiBold" pitchFamily="34" charset="-122"/>
+                <a:cs typeface="Alexandria SemiBold" pitchFamily="34" charset="-120"/>
+              </a:rPr>
+              <a:t>Prompting Strategy</a:t>
+            </a:r>
+            <a:endParaRPr lang="en-US" sz="1400" dirty="0"/>
+          </a:p>
+        </p:txBody>
+      </p:sp>
+      <p:sp>
+        <p:nvSpPr>
+          <p:cNvPr id="14" name="Text 12"/>
+          <p:cNvSpPr/>
+          <p:nvPr/>
+        </p:nvSpPr>
+        <p:spPr>
+          <a:xfrm>
+            <a:off x="473943" y="3509739"/>
+            <a:ext cx="4030340" cy="216694"/>
+          </a:xfrm>
+          <a:prstGeom prst="rect">
+            <a:avLst/>
+          </a:prstGeom>
+          <a:noFill/>
+          <a:ln/>
+        </p:spPr>
+        <p:txBody>
+          <a:bodyPr wrap="none" lIns="0" tIns="0" rIns="0" bIns="0" rtlCol="0" anchor="t"/>
+          <a:lstStyle/>
+          <a:p>
+            <a:pPr marL="0" indent="0" algn="l">
+              <a:lnSpc>
+                <a:spcPct val="133000"/>
+              </a:lnSpc>
+              <a:buNone/>
+            </a:pPr>
+            <a:r>
+              <a:rPr lang="en-US" sz="1050" dirty="0">
                 <a:solidFill>
                   <a:srgbClr val="3B3535"/>
                 </a:solidFill>
@@ -1698,22 +1974,133 @@
                 <a:ea typeface="Sora Light" pitchFamily="34" charset="-122"/>
                 <a:cs typeface="Sora Light" pitchFamily="34" charset="-120"/>
               </a:rPr>
-              <a:t>EMBEDDING / RETRIEVAL / RANKING</a:t>
-            </a:r>
-            <a:endParaRPr lang="en-US" sz="750" dirty="0"/>
-          </a:p>
-        </p:txBody>
-      </p:sp>
-      <p:sp>
-        <p:nvSpPr>
-          <p:cNvPr id="8" name="Text 6"/>
-          <p:cNvSpPr/>
-          <p:nvPr/>
-        </p:nvSpPr>
-        <p:spPr>
-          <a:xfrm>
-            <a:off x="473943" y="2059781"/>
-            <a:ext cx="8196114" cy="575742"/>
+              <a:t>Question + options + evidence → deterministic answer</a:t>
+            </a:r>
+            <a:endParaRPr lang="en-US" sz="1050" dirty="0"/>
+          </a:p>
+        </p:txBody>
+      </p:sp>
+      <p:sp>
+        <p:nvSpPr>
+          <p:cNvPr id="15" name="Text 13"/>
+          <p:cNvSpPr/>
+          <p:nvPr/>
+        </p:nvSpPr>
+        <p:spPr>
+          <a:xfrm>
+            <a:off x="4639642" y="2889200"/>
+            <a:ext cx="270793" cy="169218"/>
+          </a:xfrm>
+          <a:prstGeom prst="rect">
+            <a:avLst/>
+          </a:prstGeom>
+          <a:noFill/>
+          <a:ln/>
+        </p:spPr>
+        <p:txBody>
+          <a:bodyPr wrap="none" lIns="0" tIns="0" rIns="0" bIns="0" rtlCol="0" anchor="ctr"/>
+          <a:lstStyle/>
+          <a:p>
+            <a:pPr marL="0" indent="0" algn="l">
+              <a:lnSpc>
+                <a:spcPct val="100000"/>
+              </a:lnSpc>
+              <a:buNone/>
+            </a:pPr>
+            <a:r>
+              <a:rPr lang="en-US" sz="1050" dirty="0">
+                <a:solidFill>
+                  <a:srgbClr val="3B3535"/>
+                </a:solidFill>
+                <a:latin typeface="Alexandria Light" pitchFamily="34" charset="0"/>
+                <a:ea typeface="Alexandria Light" pitchFamily="34" charset="-122"/>
+                <a:cs typeface="Alexandria Light" pitchFamily="34" charset="-120"/>
+              </a:rPr>
+              <a:t>04</a:t>
+            </a:r>
+            <a:endParaRPr lang="en-US" sz="1050" dirty="0"/>
+          </a:p>
+        </p:txBody>
+      </p:sp>
+      <p:sp>
+        <p:nvSpPr>
+          <p:cNvPr id="16" name="Shape 14"/>
+          <p:cNvSpPr/>
+          <p:nvPr/>
+        </p:nvSpPr>
+        <p:spPr>
+          <a:xfrm>
+            <a:off x="4639642" y="3100164"/>
+            <a:ext cx="4030414" cy="19050"/>
+          </a:xfrm>
+          <a:prstGeom prst="rect">
+            <a:avLst/>
+          </a:prstGeom>
+          <a:solidFill>
+            <a:srgbClr val="1A2D7A"/>
+          </a:solidFill>
+          <a:ln/>
+        </p:spPr>
+        <p:txBody>
+          <a:bodyPr/>
+          <a:lstStyle/>
+          <a:p>
+            <a:endParaRPr lang="en-US"/>
+          </a:p>
+        </p:txBody>
+      </p:sp>
+      <p:sp>
+        <p:nvSpPr>
+          <p:cNvPr id="17" name="Text 15"/>
+          <p:cNvSpPr/>
+          <p:nvPr/>
+        </p:nvSpPr>
+        <p:spPr>
+          <a:xfrm>
+            <a:off x="4639642" y="3205907"/>
+            <a:ext cx="1781696" cy="222647"/>
+          </a:xfrm>
+          <a:prstGeom prst="rect">
+            <a:avLst/>
+          </a:prstGeom>
+          <a:noFill/>
+          <a:ln/>
+        </p:spPr>
+        <p:txBody>
+          <a:bodyPr wrap="none" lIns="0" tIns="0" rIns="0" bIns="0" rtlCol="0" anchor="t"/>
+          <a:lstStyle/>
+          <a:p>
+            <a:pPr marL="0" indent="0" algn="l">
+              <a:lnSpc>
+                <a:spcPct val="104000"/>
+              </a:lnSpc>
+              <a:buNone/>
+            </a:pPr>
+            <a:r>
+              <a:rPr lang="en-US" sz="1400" dirty="0">
+                <a:solidFill>
+                  <a:srgbClr val="3B3535"/>
+                </a:solidFill>
+                <a:latin typeface="Alexandria SemiBold" pitchFamily="34" charset="0"/>
+                <a:ea typeface="Alexandria SemiBold" pitchFamily="34" charset="-122"/>
+                <a:cs typeface="Alexandria SemiBold" pitchFamily="34" charset="-120"/>
+              </a:rPr>
+              <a:t>Validation</a:t>
+            </a:r>
+            <a:endParaRPr lang="en-US" sz="1400" dirty="0"/>
+          </a:p>
+        </p:txBody>
+      </p:sp>
+      <p:sp>
+        <p:nvSpPr>
+          <p:cNvPr id="18" name="Text 16"/>
+          <p:cNvSpPr/>
+          <p:nvPr/>
+        </p:nvSpPr>
+        <p:spPr>
+          <a:xfrm>
+            <a:off x="4639642" y="3509739"/>
+            <a:ext cx="4030414" cy="433388"/>
           </a:xfrm>
           <a:prstGeom prst="rect">
             <a:avLst/>
@@ -1729,12 +2116,12 @@
           <a:p>
             <a:pPr marL="0" indent="0" algn="l">
               <a:lnSpc>
-                <a:spcPct val="128000"/>
+                <a:spcPct val="133000"/>
               </a:lnSpc>
               <a:buNone/>
             </a:pPr>
             <a:r>
-              <a:rPr lang="en-US" sz="950" dirty="0">
+              <a:rPr lang="en-US" sz="1050" dirty="0">
                 <a:solidFill>
                   <a:srgbClr val="3B3535"/>
                 </a:solidFill>
@@ -1742,239 +2129,9 @@
                 <a:ea typeface="Sora Light" pitchFamily="34" charset="-122"/>
                 <a:cs typeface="Sora Light" pitchFamily="34" charset="-120"/>
               </a:rPr>
-              <a:t>Entity-focused query construction (1–3 queries from question + key option terms); cached retrieval of ~3 Wikipedia articles + 4 web results; evidence chunked into passages and reranked with bge-reranker-v2-m3 cross-encoder (Qwen3-Embedding dense pre-filter as fallback), keeping top ~5 passages within a 4000-character budget.</a:t>
-            </a:r>
-            <a:endParaRPr lang="en-US" sz="950" dirty="0"/>
-          </a:p>
-        </p:txBody>
-      </p:sp>
-      <p:sp>
-        <p:nvSpPr>
-          <p:cNvPr id="9" name="Shape 7"/>
-          <p:cNvSpPr/>
-          <p:nvPr/>
-        </p:nvSpPr>
-        <p:spPr>
-          <a:xfrm>
-            <a:off x="473943" y="2764929"/>
-            <a:ext cx="1326952" cy="228377"/>
-          </a:xfrm>
-          <a:prstGeom prst="roundRect">
-            <a:avLst>
-              <a:gd name="adj" fmla="val 18366"/>
-            </a:avLst>
-          </a:prstGeom>
-          <a:solidFill>
-            <a:srgbClr val="D5DCF6"/>
-          </a:solidFill>
-          <a:ln/>
-        </p:spPr>
-        <p:txBody>
-          <a:bodyPr/>
-          <a:lstStyle/>
-          <a:p>
-            <a:endParaRPr lang="en-US"/>
-          </a:p>
-        </p:txBody>
-      </p:sp>
-      <p:sp>
-        <p:nvSpPr>
-          <p:cNvPr id="10" name="Text 8"/>
-          <p:cNvSpPr/>
-          <p:nvPr/>
-        </p:nvSpPr>
-        <p:spPr>
-          <a:xfrm>
-            <a:off x="548804" y="2802359"/>
-            <a:ext cx="1634430" cy="153516"/>
-          </a:xfrm>
-          <a:prstGeom prst="rect">
-            <a:avLst/>
-          </a:prstGeom>
-          <a:noFill/>
-          <a:ln/>
-        </p:spPr>
-        <p:txBody>
-          <a:bodyPr wrap="none" lIns="0" tIns="0" rIns="0" bIns="0" rtlCol="0" anchor="t"/>
-          <a:lstStyle/>
-          <a:p>
-            <a:pPr marL="0" indent="0" algn="l">
-              <a:lnSpc>
-                <a:spcPct val="128000"/>
-              </a:lnSpc>
-              <a:buNone/>
-            </a:pPr>
-            <a:r>
-              <a:rPr lang="en-US" sz="750" dirty="0">
-                <a:solidFill>
-                  <a:srgbClr val="3B3535"/>
-                </a:solidFill>
-                <a:latin typeface="Sora Light" pitchFamily="34" charset="0"/>
-                <a:ea typeface="Sora Light" pitchFamily="34" charset="-122"/>
-                <a:cs typeface="Sora Light" pitchFamily="34" charset="-120"/>
-              </a:rPr>
-              <a:t>PROMPTING STRATEGY</a:t>
-            </a:r>
-            <a:endParaRPr lang="en-US" sz="750" dirty="0"/>
-          </a:p>
-        </p:txBody>
-      </p:sp>
-      <p:sp>
-        <p:nvSpPr>
-          <p:cNvPr id="11" name="Text 9"/>
-          <p:cNvSpPr/>
-          <p:nvPr/>
-        </p:nvSpPr>
-        <p:spPr>
-          <a:xfrm>
-            <a:off x="473943" y="3122712"/>
-            <a:ext cx="8196114" cy="575742"/>
-          </a:xfrm>
-          <a:prstGeom prst="rect">
-            <a:avLst/>
-          </a:prstGeom>
-          <a:noFill/>
-          <a:ln/>
-        </p:spPr>
-        <p:txBody>
-          <a:bodyPr wrap="square" lIns="0" tIns="0" rIns="0" bIns="0" rtlCol="0" anchor="t">
-            <a:normAutofit/>
-          </a:bodyPr>
-          <a:lstStyle/>
-          <a:p>
-            <a:pPr marL="0" indent="0" algn="l">
-              <a:lnSpc>
-                <a:spcPct val="128000"/>
-              </a:lnSpc>
-              <a:buNone/>
-            </a:pPr>
-            <a:r>
-              <a:rPr lang="en-US" sz="950" dirty="0">
-                <a:solidFill>
-                  <a:srgbClr val="3B3535"/>
-                </a:solidFill>
-                <a:latin typeface="Sora Light" pitchFamily="34" charset="0"/>
-                <a:ea typeface="Sora Light" pitchFamily="34" charset="-122"/>
-                <a:cs typeface="Sora Light" pitchFamily="34" charset="-120"/>
-              </a:rPr>
-              <a:t>Question + options + top evidence, asking for brief reasoning then "Answer: ". Two prompt methods — RAG (evidence) and closed-book — run for agreement-based confidence. Qwen3-8B at temperature 0 with /no_think and fixed seed (deterministic), plus seeded self-consistency samples.</a:t>
-            </a:r>
-            <a:endParaRPr lang="en-US" sz="950" dirty="0"/>
-          </a:p>
-        </p:txBody>
-      </p:sp>
-      <p:sp>
-        <p:nvSpPr>
-          <p:cNvPr id="12" name="Shape 10"/>
-          <p:cNvSpPr/>
-          <p:nvPr/>
-        </p:nvSpPr>
-        <p:spPr>
-          <a:xfrm>
-            <a:off x="473943" y="3827859"/>
-            <a:ext cx="781348" cy="228377"/>
-          </a:xfrm>
-          <a:prstGeom prst="roundRect">
-            <a:avLst>
-              <a:gd name="adj" fmla="val 18366"/>
-            </a:avLst>
-          </a:prstGeom>
-          <a:solidFill>
-            <a:srgbClr val="D5DCF6"/>
-          </a:solidFill>
-          <a:ln/>
-        </p:spPr>
-        <p:txBody>
-          <a:bodyPr/>
-          <a:lstStyle/>
-          <a:p>
-            <a:endParaRPr lang="en-US"/>
-          </a:p>
-        </p:txBody>
-      </p:sp>
-      <p:sp>
-        <p:nvSpPr>
-          <p:cNvPr id="13" name="Text 11"/>
-          <p:cNvSpPr/>
-          <p:nvPr/>
-        </p:nvSpPr>
-        <p:spPr>
-          <a:xfrm>
-            <a:off x="548804" y="3865290"/>
-            <a:ext cx="1088827" cy="153516"/>
-          </a:xfrm>
-          <a:prstGeom prst="rect">
-            <a:avLst/>
-          </a:prstGeom>
-          <a:noFill/>
-          <a:ln/>
-        </p:spPr>
-        <p:txBody>
-          <a:bodyPr wrap="none" lIns="0" tIns="0" rIns="0" bIns="0" rtlCol="0" anchor="t"/>
-          <a:lstStyle/>
-          <a:p>
-            <a:pPr marL="0" indent="0" algn="l">
-              <a:lnSpc>
-                <a:spcPct val="128000"/>
-              </a:lnSpc>
-              <a:buNone/>
-            </a:pPr>
-            <a:r>
-              <a:rPr lang="en-US" sz="750" dirty="0">
-                <a:solidFill>
-                  <a:srgbClr val="3B3535"/>
-                </a:solidFill>
-                <a:latin typeface="Sora Light" pitchFamily="34" charset="0"/>
-                <a:ea typeface="Sora Light" pitchFamily="34" charset="-122"/>
-                <a:cs typeface="Sora Light" pitchFamily="34" charset="-120"/>
-              </a:rPr>
-              <a:t>VALIDATION</a:t>
-            </a:r>
-            <a:endParaRPr lang="en-US" sz="750" dirty="0"/>
-          </a:p>
-        </p:txBody>
-      </p:sp>
-      <p:sp>
-        <p:nvSpPr>
-          <p:cNvPr id="14" name="Text 12"/>
-          <p:cNvSpPr/>
-          <p:nvPr/>
-        </p:nvSpPr>
-        <p:spPr>
-          <a:xfrm>
-            <a:off x="473943" y="4185642"/>
-            <a:ext cx="8196114" cy="575742"/>
-          </a:xfrm>
-          <a:prstGeom prst="rect">
-            <a:avLst/>
-          </a:prstGeom>
-          <a:noFill/>
-          <a:ln/>
-        </p:spPr>
-        <p:txBody>
-          <a:bodyPr wrap="square" lIns="0" tIns="0" rIns="0" bIns="0" rtlCol="0" anchor="t">
-            <a:normAutofit/>
-          </a:bodyPr>
-          <a:lstStyle/>
-          <a:p>
-            <a:pPr marL="0" indent="0" algn="l">
-              <a:lnSpc>
-                <a:spcPct val="128000"/>
-              </a:lnSpc>
-              <a:buNone/>
-            </a:pPr>
-            <a:r>
-              <a:rPr lang="en-US" sz="950" dirty="0">
-                <a:solidFill>
-                  <a:srgbClr val="3B3535"/>
-                </a:solidFill>
-                <a:latin typeface="Sora Light" pitchFamily="34" charset="0"/>
-                <a:ea typeface="Sora Light" pitchFamily="34" charset="-122"/>
-                <a:cs typeface="Sora Light" pitchFamily="34" charset="-120"/>
-              </a:rPr>
-              <a:t>Robust final-letter parsing; confidence score from agreement across samples, methods (RAG vs closed-book) and models plus evidence support; low-confidence questions escalated to 4B voters (weighted majority); sourced human verification of low-confidence/disputed items; submission validator (exactly 100 rows, values A–E or Unknown); pytest unit tests.</a:t>
-            </a:r>
-            <a:endParaRPr lang="en-US" sz="950" dirty="0"/>
+              <a:t>Confidence scoring → escalation → verification → submission check</a:t>
+            </a:r>
+            <a:endParaRPr lang="en-US" sz="1050" dirty="0"/>
           </a:p>
         </p:txBody>
       </p:sp>
@@ -2011,8 +2168,8 @@
         </p:nvSpPr>
         <p:spPr>
           <a:xfrm>
-            <a:off x="473943" y="418430"/>
-            <a:ext cx="3848398" cy="417537"/>
+            <a:off x="1191071" y="409947"/>
+            <a:ext cx="2944713" cy="306214"/>
           </a:xfrm>
           <a:prstGeom prst="rect">
             <a:avLst/>
@@ -2031,7 +2188,7 @@
               <a:buNone/>
             </a:pPr>
             <a:r>
-              <a:rPr lang="en-US" sz="2600" dirty="0">
+              <a:rPr lang="en-US" sz="1900" dirty="0">
                 <a:solidFill>
                   <a:srgbClr val="1F1E1E"/>
                 </a:solidFill>
@@ -2041,7 +2198,7 @@
               </a:rPr>
               <a:t>Results &amp; Reflection</a:t>
             </a:r>
-            <a:endParaRPr lang="en-US" sz="2600" dirty="0"/>
+            <a:endParaRPr lang="en-US" sz="1900" dirty="0"/>
           </a:p>
         </p:txBody>
       </p:sp>
@@ -2053,12 +2210,12 @@
         </p:nvSpPr>
         <p:spPr>
           <a:xfrm>
-            <a:off x="473943" y="1073944"/>
-            <a:ext cx="850329" cy="233437"/>
+            <a:off x="1191071" y="844153"/>
+            <a:ext cx="623367" cy="156344"/>
           </a:xfrm>
           <a:prstGeom prst="roundRect">
             <a:avLst>
-              <a:gd name="adj" fmla="val 18273"/>
+              <a:gd name="adj" fmla="val 20008"/>
             </a:avLst>
           </a:prstGeom>
           <a:solidFill>
@@ -2082,8 +2239,8 @@
         </p:nvSpPr>
         <p:spPr>
           <a:xfrm>
-            <a:off x="550069" y="1111969"/>
-            <a:ext cx="1155278" cy="157386"/>
+            <a:off x="1246882" y="872058"/>
+            <a:ext cx="968946" cy="100533"/>
           </a:xfrm>
           <a:prstGeom prst="rect">
             <a:avLst/>
@@ -2097,12 +2254,12 @@
           <a:p>
             <a:pPr marL="0" indent="0" algn="l">
               <a:lnSpc>
-                <a:spcPct val="129000"/>
+                <a:spcPct val="113000"/>
               </a:lnSpc>
               <a:buNone/>
             </a:pPr>
             <a:r>
-              <a:rPr lang="en-US" sz="750" dirty="0">
+              <a:rPr lang="en-US" sz="550" dirty="0">
                 <a:solidFill>
                   <a:srgbClr val="3B3535"/>
                 </a:solidFill>
@@ -2112,7 +2269,7 @@
               </a:rPr>
               <a:t>FINAL SCORE</a:t>
             </a:r>
-            <a:endParaRPr lang="en-US" sz="750" dirty="0"/>
+            <a:endParaRPr lang="en-US" sz="550" dirty="0"/>
           </a:p>
         </p:txBody>
       </p:sp>
@@ -2124,8 +2281,510 @@
         </p:nvSpPr>
         <p:spPr>
           <a:xfrm>
-            <a:off x="473943" y="1441252"/>
-            <a:ext cx="8196114" cy="393502"/>
+            <a:off x="1191071" y="1118964"/>
+            <a:ext cx="3340894" cy="307256"/>
+          </a:xfrm>
+          <a:prstGeom prst="rect">
+            <a:avLst/>
+          </a:prstGeom>
+          <a:noFill/>
+          <a:ln/>
+        </p:spPr>
+        <p:txBody>
+          <a:bodyPr wrap="none" lIns="0" tIns="0" rIns="0" bIns="0" rtlCol="0" anchor="t"/>
+          <a:lstStyle/>
+          <a:p>
+            <a:pPr marL="0" indent="0" algn="ctr">
+              <a:lnSpc>
+                <a:spcPct val="83000"/>
+              </a:lnSpc>
+              <a:buNone/>
+            </a:pPr>
+            <a:r>
+              <a:rPr lang="en-US" sz="2400" dirty="0">
+                <a:solidFill>
+                  <a:srgbClr val="3B3535"/>
+                </a:solidFill>
+                <a:latin typeface="Alexandria SemiBold" pitchFamily="34" charset="0"/>
+                <a:ea typeface="Alexandria SemiBold" pitchFamily="34" charset="-122"/>
+                <a:cs typeface="Alexandria SemiBold" pitchFamily="34" charset="-120"/>
+              </a:rPr>
+              <a:t>90%</a:t>
+            </a:r>
+            <a:endParaRPr lang="en-US" sz="2400" dirty="0"/>
+          </a:p>
+        </p:txBody>
+      </p:sp>
+      <p:sp>
+        <p:nvSpPr>
+          <p:cNvPr id="6" name="Text 4"/>
+          <p:cNvSpPr/>
+          <p:nvPr/>
+        </p:nvSpPr>
+        <p:spPr>
+          <a:xfrm>
+            <a:off x="2249016" y="1520726"/>
+            <a:ext cx="1224930" cy="153070"/>
+          </a:xfrm>
+          <a:prstGeom prst="rect">
+            <a:avLst/>
+          </a:prstGeom>
+          <a:noFill/>
+          <a:ln/>
+        </p:spPr>
+        <p:txBody>
+          <a:bodyPr wrap="none" lIns="0" tIns="0" rIns="0" bIns="0" rtlCol="0" anchor="t"/>
+          <a:lstStyle/>
+          <a:p>
+            <a:pPr marL="0" indent="0" algn="ctr">
+              <a:lnSpc>
+                <a:spcPct val="104000"/>
+              </a:lnSpc>
+              <a:buNone/>
+            </a:pPr>
+            <a:r>
+              <a:rPr lang="en-US" sz="950" dirty="0">
+                <a:solidFill>
+                  <a:srgbClr val="3B3535"/>
+                </a:solidFill>
+                <a:latin typeface="Alexandria SemiBold" pitchFamily="34" charset="0"/>
+                <a:ea typeface="Alexandria SemiBold" pitchFamily="34" charset="-122"/>
+                <a:cs typeface="Alexandria SemiBold" pitchFamily="34" charset="-120"/>
+              </a:rPr>
+              <a:t>Closed-book</a:t>
+            </a:r>
+            <a:endParaRPr lang="en-US" sz="950" dirty="0"/>
+          </a:p>
+        </p:txBody>
+      </p:sp>
+      <p:sp>
+        <p:nvSpPr>
+          <p:cNvPr id="7" name="Text 5"/>
+          <p:cNvSpPr/>
+          <p:nvPr/>
+        </p:nvSpPr>
+        <p:spPr>
+          <a:xfrm>
+            <a:off x="4611960" y="1118964"/>
+            <a:ext cx="3340894" cy="307256"/>
+          </a:xfrm>
+          <a:prstGeom prst="rect">
+            <a:avLst/>
+          </a:prstGeom>
+          <a:noFill/>
+          <a:ln/>
+        </p:spPr>
+        <p:txBody>
+          <a:bodyPr wrap="none" lIns="0" tIns="0" rIns="0" bIns="0" rtlCol="0" anchor="t"/>
+          <a:lstStyle/>
+          <a:p>
+            <a:pPr marL="0" indent="0" algn="ctr">
+              <a:lnSpc>
+                <a:spcPct val="83000"/>
+              </a:lnSpc>
+              <a:buNone/>
+            </a:pPr>
+            <a:r>
+              <a:rPr lang="en-US" sz="2400" dirty="0">
+                <a:solidFill>
+                  <a:srgbClr val="3B3535"/>
+                </a:solidFill>
+                <a:latin typeface="Alexandria SemiBold" pitchFamily="34" charset="0"/>
+                <a:ea typeface="Alexandria SemiBold" pitchFamily="34" charset="-122"/>
+                <a:cs typeface="Alexandria SemiBold" pitchFamily="34" charset="-120"/>
+              </a:rPr>
+              <a:t>100%</a:t>
+            </a:r>
+            <a:endParaRPr lang="en-US" sz="2400" dirty="0"/>
+          </a:p>
+        </p:txBody>
+      </p:sp>
+      <p:sp>
+        <p:nvSpPr>
+          <p:cNvPr id="8" name="Text 6"/>
+          <p:cNvSpPr/>
+          <p:nvPr/>
+        </p:nvSpPr>
+        <p:spPr>
+          <a:xfrm>
+            <a:off x="5669905" y="1520726"/>
+            <a:ext cx="1224930" cy="153070"/>
+          </a:xfrm>
+          <a:prstGeom prst="rect">
+            <a:avLst/>
+          </a:prstGeom>
+          <a:noFill/>
+          <a:ln/>
+        </p:spPr>
+        <p:txBody>
+          <a:bodyPr wrap="none" lIns="0" tIns="0" rIns="0" bIns="0" rtlCol="0" anchor="t"/>
+          <a:lstStyle/>
+          <a:p>
+            <a:pPr marL="0" indent="0" algn="ctr">
+              <a:lnSpc>
+                <a:spcPct val="104000"/>
+              </a:lnSpc>
+              <a:buNone/>
+            </a:pPr>
+            <a:r>
+              <a:rPr lang="en-US" sz="950" dirty="0">
+                <a:solidFill>
+                  <a:srgbClr val="3B3535"/>
+                </a:solidFill>
+                <a:latin typeface="Alexandria SemiBold" pitchFamily="34" charset="0"/>
+                <a:ea typeface="Alexandria SemiBold" pitchFamily="34" charset="-122"/>
+                <a:cs typeface="Alexandria SemiBold" pitchFamily="34" charset="-120"/>
+              </a:rPr>
+              <a:t>RAG</a:t>
+            </a:r>
+            <a:endParaRPr lang="en-US" sz="950" dirty="0"/>
+          </a:p>
+        </p:txBody>
+      </p:sp>
+      <p:sp>
+        <p:nvSpPr>
+          <p:cNvPr id="9" name="Text 7"/>
+          <p:cNvSpPr/>
+          <p:nvPr/>
+        </p:nvSpPr>
+        <p:spPr>
+          <a:xfrm>
+            <a:off x="1191071" y="1848296"/>
+            <a:ext cx="3340894" cy="307256"/>
+          </a:xfrm>
+          <a:prstGeom prst="rect">
+            <a:avLst/>
+          </a:prstGeom>
+          <a:noFill/>
+          <a:ln/>
+        </p:spPr>
+        <p:txBody>
+          <a:bodyPr wrap="none" lIns="0" tIns="0" rIns="0" bIns="0" rtlCol="0" anchor="t"/>
+          <a:lstStyle/>
+          <a:p>
+            <a:pPr marL="0" indent="0" algn="ctr">
+              <a:lnSpc>
+                <a:spcPct val="83000"/>
+              </a:lnSpc>
+              <a:buNone/>
+            </a:pPr>
+            <a:r>
+              <a:rPr lang="en-US" sz="2400" dirty="0">
+                <a:solidFill>
+                  <a:srgbClr val="3B3535"/>
+                </a:solidFill>
+                <a:latin typeface="Alexandria SemiBold" pitchFamily="34" charset="0"/>
+                <a:ea typeface="Alexandria SemiBold" pitchFamily="34" charset="-122"/>
+                <a:cs typeface="Alexandria SemiBold" pitchFamily="34" charset="-120"/>
+              </a:rPr>
+              <a:t>100%</a:t>
+            </a:r>
+            <a:endParaRPr lang="en-US" sz="2400" dirty="0"/>
+          </a:p>
+        </p:txBody>
+      </p:sp>
+      <p:sp>
+        <p:nvSpPr>
+          <p:cNvPr id="10" name="Text 8"/>
+          <p:cNvSpPr/>
+          <p:nvPr/>
+        </p:nvSpPr>
+        <p:spPr>
+          <a:xfrm>
+            <a:off x="2249016" y="2250058"/>
+            <a:ext cx="1224930" cy="153070"/>
+          </a:xfrm>
+          <a:prstGeom prst="rect">
+            <a:avLst/>
+          </a:prstGeom>
+          <a:noFill/>
+          <a:ln/>
+        </p:spPr>
+        <p:txBody>
+          <a:bodyPr wrap="none" lIns="0" tIns="0" rIns="0" bIns="0" rtlCol="0" anchor="t"/>
+          <a:lstStyle/>
+          <a:p>
+            <a:pPr marL="0" indent="0" algn="ctr">
+              <a:lnSpc>
+                <a:spcPct val="104000"/>
+              </a:lnSpc>
+              <a:buNone/>
+            </a:pPr>
+            <a:r>
+              <a:rPr lang="en-US" sz="950" dirty="0">
+                <a:solidFill>
+                  <a:srgbClr val="3B3535"/>
+                </a:solidFill>
+                <a:latin typeface="Alexandria SemiBold" pitchFamily="34" charset="0"/>
+                <a:ea typeface="Alexandria SemiBold" pitchFamily="34" charset="-122"/>
+                <a:cs typeface="Alexandria SemiBold" pitchFamily="34" charset="-120"/>
+              </a:rPr>
+              <a:t>RAG + confidence</a:t>
+            </a:r>
+            <a:endParaRPr lang="en-US" sz="950" dirty="0"/>
+          </a:p>
+        </p:txBody>
+      </p:sp>
+      <p:sp>
+        <p:nvSpPr>
+          <p:cNvPr id="11" name="Text 9"/>
+          <p:cNvSpPr/>
+          <p:nvPr/>
+        </p:nvSpPr>
+        <p:spPr>
+          <a:xfrm>
+            <a:off x="4611960" y="1848296"/>
+            <a:ext cx="3340894" cy="307256"/>
+          </a:xfrm>
+          <a:prstGeom prst="rect">
+            <a:avLst/>
+          </a:prstGeom>
+          <a:noFill/>
+          <a:ln/>
+        </p:spPr>
+        <p:txBody>
+          <a:bodyPr wrap="none" lIns="0" tIns="0" rIns="0" bIns="0" rtlCol="0" anchor="t"/>
+          <a:lstStyle/>
+          <a:p>
+            <a:pPr marL="0" indent="0" algn="ctr">
+              <a:lnSpc>
+                <a:spcPct val="83000"/>
+              </a:lnSpc>
+              <a:buNone/>
+            </a:pPr>
+            <a:r>
+              <a:rPr lang="en-US" sz="2400" dirty="0">
+                <a:solidFill>
+                  <a:srgbClr val="3B3535"/>
+                </a:solidFill>
+                <a:latin typeface="Alexandria SemiBold" pitchFamily="34" charset="0"/>
+                <a:ea typeface="Alexandria SemiBold" pitchFamily="34" charset="-122"/>
+                <a:cs typeface="Alexandria SemiBold" pitchFamily="34" charset="-120"/>
+              </a:rPr>
+              <a:t>100</a:t>
+            </a:r>
+            <a:endParaRPr lang="en-US" sz="2400" dirty="0"/>
+          </a:p>
+        </p:txBody>
+      </p:sp>
+      <p:sp>
+        <p:nvSpPr>
+          <p:cNvPr id="12" name="Text 10"/>
+          <p:cNvSpPr/>
+          <p:nvPr/>
+        </p:nvSpPr>
+        <p:spPr>
+          <a:xfrm>
+            <a:off x="5649962" y="2250058"/>
+            <a:ext cx="1264816" cy="153070"/>
+          </a:xfrm>
+          <a:prstGeom prst="rect">
+            <a:avLst/>
+          </a:prstGeom>
+          <a:noFill/>
+          <a:ln/>
+        </p:spPr>
+        <p:txBody>
+          <a:bodyPr wrap="none" lIns="0" tIns="0" rIns="0" bIns="0" rtlCol="0" anchor="t"/>
+          <a:lstStyle/>
+          <a:p>
+            <a:pPr marL="0" indent="0" algn="ctr">
+              <a:lnSpc>
+                <a:spcPct val="104000"/>
+              </a:lnSpc>
+              <a:buNone/>
+            </a:pPr>
+            <a:r>
+              <a:rPr lang="en-US" sz="950" dirty="0">
+                <a:solidFill>
+                  <a:srgbClr val="3B3535"/>
+                </a:solidFill>
+                <a:latin typeface="Alexandria SemiBold" pitchFamily="34" charset="0"/>
+                <a:ea typeface="Alexandria SemiBold" pitchFamily="34" charset="-122"/>
+                <a:cs typeface="Alexandria SemiBold" pitchFamily="34" charset="-120"/>
+              </a:rPr>
+              <a:t>Questions answered</a:t>
+            </a:r>
+            <a:endParaRPr lang="en-US" sz="950" dirty="0"/>
+          </a:p>
+        </p:txBody>
+      </p:sp>
+      <p:sp>
+        <p:nvSpPr>
+          <p:cNvPr id="13" name="Text 11"/>
+          <p:cNvSpPr/>
+          <p:nvPr/>
+        </p:nvSpPr>
+        <p:spPr>
+          <a:xfrm>
+            <a:off x="4611960" y="2441525"/>
+            <a:ext cx="3340894" cy="125611"/>
+          </a:xfrm>
+          <a:prstGeom prst="rect">
+            <a:avLst/>
+          </a:prstGeom>
+          <a:noFill/>
+          <a:ln/>
+        </p:spPr>
+        <p:txBody>
+          <a:bodyPr wrap="none" lIns="0" tIns="0" rIns="0" bIns="0" rtlCol="0" anchor="t"/>
+          <a:lstStyle/>
+          <a:p>
+            <a:pPr marL="0" indent="0" algn="ctr">
+              <a:lnSpc>
+                <a:spcPct val="113000"/>
+              </a:lnSpc>
+              <a:buNone/>
+            </a:pPr>
+            <a:r>
+              <a:rPr lang="en-US" sz="700" dirty="0">
+                <a:solidFill>
+                  <a:srgbClr val="3B3535"/>
+                </a:solidFill>
+                <a:latin typeface="Sora Light" pitchFamily="34" charset="0"/>
+                <a:ea typeface="Sora Light" pitchFamily="34" charset="-122"/>
+                <a:cs typeface="Sora Light" pitchFamily="34" charset="-120"/>
+              </a:rPr>
+              <a:t>All 100, including 1 Unknown</a:t>
+            </a:r>
+            <a:endParaRPr lang="en-US" sz="700" dirty="0"/>
+          </a:p>
+        </p:txBody>
+      </p:sp>
+      <p:sp>
+        <p:nvSpPr>
+          <p:cNvPr id="14" name="Shape 12"/>
+          <p:cNvSpPr/>
+          <p:nvPr/>
+        </p:nvSpPr>
+        <p:spPr>
+          <a:xfrm>
+            <a:off x="1191071" y="2639095"/>
+            <a:ext cx="1235943" cy="156344"/>
+          </a:xfrm>
+          <a:prstGeom prst="roundRect">
+            <a:avLst>
+              <a:gd name="adj" fmla="val 20008"/>
+            </a:avLst>
+          </a:prstGeom>
+          <a:solidFill>
+            <a:srgbClr val="D5DCF6"/>
+          </a:solidFill>
+          <a:ln/>
+        </p:spPr>
+        <p:txBody>
+          <a:bodyPr/>
+          <a:lstStyle/>
+          <a:p>
+            <a:endParaRPr lang="en-US"/>
+          </a:p>
+        </p:txBody>
+      </p:sp>
+      <p:sp>
+        <p:nvSpPr>
+          <p:cNvPr id="15" name="Text 13"/>
+          <p:cNvSpPr/>
+          <p:nvPr/>
+        </p:nvSpPr>
+        <p:spPr>
+          <a:xfrm>
+            <a:off x="1246882" y="2667000"/>
+            <a:ext cx="1581522" cy="100533"/>
+          </a:xfrm>
+          <a:prstGeom prst="rect">
+            <a:avLst/>
+          </a:prstGeom>
+          <a:noFill/>
+          <a:ln/>
+        </p:spPr>
+        <p:txBody>
+          <a:bodyPr wrap="none" lIns="0" tIns="0" rIns="0" bIns="0" rtlCol="0" anchor="t"/>
+          <a:lstStyle/>
+          <a:p>
+            <a:pPr marL="0" indent="0" algn="l">
+              <a:lnSpc>
+                <a:spcPct val="113000"/>
+              </a:lnSpc>
+              <a:buNone/>
+            </a:pPr>
+            <a:r>
+              <a:rPr lang="en-US" sz="550" dirty="0">
+                <a:solidFill>
+                  <a:srgbClr val="3B3535"/>
+                </a:solidFill>
+                <a:latin typeface="Sora Light" pitchFamily="34" charset="0"/>
+                <a:ea typeface="Sora Light" pitchFamily="34" charset="-122"/>
+                <a:cs typeface="Sora Light" pitchFamily="34" charset="-120"/>
+              </a:rPr>
+              <a:t>MOST USEFUL IMPROVEMENT</a:t>
+            </a:r>
+            <a:endParaRPr lang="en-US" sz="550" dirty="0"/>
+          </a:p>
+        </p:txBody>
+      </p:sp>
+      <p:sp>
+        <p:nvSpPr>
+          <p:cNvPr id="16" name="Shape 14"/>
+          <p:cNvSpPr/>
+          <p:nvPr/>
+        </p:nvSpPr>
+        <p:spPr>
+          <a:xfrm>
+            <a:off x="1191071" y="2867397"/>
+            <a:ext cx="6761783" cy="412849"/>
+          </a:xfrm>
+          <a:prstGeom prst="roundRect">
+            <a:avLst>
+              <a:gd name="adj" fmla="val 9471"/>
+            </a:avLst>
+          </a:prstGeom>
+          <a:solidFill>
+            <a:srgbClr val="C0CAF2"/>
+          </a:solidFill>
+          <a:ln/>
+        </p:spPr>
+        <p:txBody>
+          <a:bodyPr/>
+          <a:lstStyle/>
+          <a:p>
+            <a:endParaRPr lang="en-US"/>
+          </a:p>
+        </p:txBody>
+      </p:sp>
+      <p:pic>
+        <p:nvPicPr>
+          <p:cNvPr id="17" name="Image 0" descr="preencoded.png"/>
+          <p:cNvPicPr>
+            <a:picLocks noChangeAspect="1"/>
+          </p:cNvPicPr>
+          <p:nvPr/>
+        </p:nvPicPr>
+        <p:blipFill>
+          <a:blip r:embed="rId3"/>
+          <a:stretch>
+            <a:fillRect/>
+          </a:stretch>
+        </p:blipFill>
+        <p:spPr>
+          <a:xfrm>
+            <a:off x="1284163" y="2987948"/>
+            <a:ext cx="116309" cy="93092"/>
+          </a:xfrm>
+          <a:prstGeom prst="rect">
+            <a:avLst/>
+          </a:prstGeom>
+        </p:spPr>
+      </p:pic>
+      <p:sp>
+        <p:nvSpPr>
+          <p:cNvPr id="18" name="Text 15"/>
+          <p:cNvSpPr/>
+          <p:nvPr/>
+        </p:nvSpPr>
+        <p:spPr>
+          <a:xfrm>
+            <a:off x="1493565" y="2948211"/>
+            <a:ext cx="6366197" cy="251222"/>
           </a:xfrm>
           <a:prstGeom prst="rect">
             <a:avLst/>
@@ -2141,39 +2800,39 @@
           <a:p>
             <a:pPr marL="0" indent="0" algn="l">
               <a:lnSpc>
-                <a:spcPct val="129000"/>
+                <a:spcPct val="113000"/>
               </a:lnSpc>
               <a:buNone/>
             </a:pPr>
             <a:r>
-              <a:rPr lang="en-US" sz="950" dirty="0">
-                <a:solidFill>
-                  <a:srgbClr val="3B3535"/>
+              <a:rPr lang="en-US" sz="700" dirty="0">
+                <a:solidFill>
+                  <a:srgbClr val="000000"/>
                 </a:solidFill>
                 <a:latin typeface="Sora Light" pitchFamily="34" charset="0"/>
                 <a:ea typeface="Sora Light" pitchFamily="34" charset="-122"/>
                 <a:cs typeface="Sora Light" pitchFamily="34" charset="-120"/>
               </a:rPr>
-              <a:t>No official answer key exists. On a 20-question hand-verified gold set: closed-book 90%, RAG 100%, RAG+confidence 100% — retrieval adds +10 points. All 100 questions answered (including one Unknown for the unanswerable Q79).</a:t>
-            </a:r>
-            <a:endParaRPr lang="en-US" sz="950" dirty="0"/>
-          </a:p>
-        </p:txBody>
-      </p:sp>
-      <p:sp>
-        <p:nvSpPr>
-          <p:cNvPr id="6" name="Shape 4"/>
-          <p:cNvSpPr/>
-          <p:nvPr/>
-        </p:nvSpPr>
-        <p:spPr>
-          <a:xfrm>
-            <a:off x="473943" y="1968624"/>
-            <a:ext cx="1685851" cy="233437"/>
+              <a:t>Wikipedia-grounded retrieval — adds +10 points over model alone by grounding the 8B reasoner in Wikipedia evidence with cross-encoder reranking and ensemble/confidence escalation</a:t>
+            </a:r>
+            <a:endParaRPr lang="en-US" sz="700" dirty="0"/>
+          </a:p>
+        </p:txBody>
+      </p:sp>
+      <p:sp>
+        <p:nvSpPr>
+          <p:cNvPr id="19" name="Shape 16"/>
+          <p:cNvSpPr/>
+          <p:nvPr/>
+        </p:nvSpPr>
+        <p:spPr>
+          <a:xfrm>
+            <a:off x="1191071" y="3352205"/>
+            <a:ext cx="933896" cy="156344"/>
           </a:xfrm>
           <a:prstGeom prst="roundRect">
             <a:avLst>
-              <a:gd name="adj" fmla="val 18273"/>
+              <a:gd name="adj" fmla="val 20008"/>
             </a:avLst>
           </a:prstGeom>
           <a:solidFill>
@@ -2191,14 +2850,14 @@
       </p:sp>
       <p:sp>
         <p:nvSpPr>
-          <p:cNvPr id="7" name="Text 5"/>
-          <p:cNvSpPr/>
-          <p:nvPr/>
-        </p:nvSpPr>
-        <p:spPr>
-          <a:xfrm>
-            <a:off x="550069" y="2006650"/>
-            <a:ext cx="1990799" cy="157386"/>
+          <p:cNvPr id="20" name="Text 17"/>
+          <p:cNvSpPr/>
+          <p:nvPr/>
+        </p:nvSpPr>
+        <p:spPr>
+          <a:xfrm>
+            <a:off x="1246882" y="3380110"/>
+            <a:ext cx="1279475" cy="100533"/>
           </a:xfrm>
           <a:prstGeom prst="rect">
             <a:avLst/>
@@ -2212,12 +2871,12 @@
           <a:p>
             <a:pPr marL="0" indent="0" algn="l">
               <a:lnSpc>
-                <a:spcPct val="129000"/>
+                <a:spcPct val="113000"/>
               </a:lnSpc>
               <a:buNone/>
             </a:pPr>
             <a:r>
-              <a:rPr lang="en-US" sz="750" dirty="0">
+              <a:rPr lang="en-US" sz="550" dirty="0">
                 <a:solidFill>
                   <a:srgbClr val="3B3535"/>
                 </a:solidFill>
@@ -2225,22 +2884,22 @@
                 <a:ea typeface="Sora Light" pitchFamily="34" charset="-122"/>
                 <a:cs typeface="Sora Light" pitchFamily="34" charset="-120"/>
               </a:rPr>
-              <a:t>MOST USEFUL IMPROVEMENT</a:t>
-            </a:r>
-            <a:endParaRPr lang="en-US" sz="750" dirty="0"/>
-          </a:p>
-        </p:txBody>
-      </p:sp>
-      <p:sp>
-        <p:nvSpPr>
-          <p:cNvPr id="8" name="Text 6"/>
-          <p:cNvSpPr/>
-          <p:nvPr/>
-        </p:nvSpPr>
-        <p:spPr>
-          <a:xfrm>
-            <a:off x="473943" y="2335932"/>
-            <a:ext cx="8196114" cy="590252"/>
+              <a:t>KNOWN LIMITATIONS</a:t>
+            </a:r>
+            <a:endParaRPr lang="en-US" sz="550" dirty="0"/>
+          </a:p>
+        </p:txBody>
+      </p:sp>
+      <p:sp>
+        <p:nvSpPr>
+          <p:cNvPr id="21" name="Text 18"/>
+          <p:cNvSpPr/>
+          <p:nvPr/>
+        </p:nvSpPr>
+        <p:spPr>
+          <a:xfrm>
+            <a:off x="1191071" y="3580507"/>
+            <a:ext cx="6761783" cy="717649"/>
           </a:xfrm>
           <a:prstGeom prst="rect">
             <a:avLst/>
@@ -2254,14 +2913,15 @@
           </a:bodyPr>
           <a:lstStyle/>
           <a:p>
-            <a:pPr marL="0" indent="0" algn="l">
-              <a:lnSpc>
-                <a:spcPct val="129000"/>
-              </a:lnSpc>
-              <a:buNone/>
-            </a:pPr>
-            <a:r>
-              <a:rPr lang="en-US" sz="950" dirty="0">
+            <a:pPr marL="342900" indent="-342900" algn="l">
+              <a:lnSpc>
+                <a:spcPct val="113000"/>
+              </a:lnSpc>
+              <a:buSzPct val="100000"/>
+              <a:buChar char="•"/>
+            </a:pPr>
+            <a:r>
+              <a:rPr lang="en-US" sz="700" dirty="0">
                 <a:solidFill>
                   <a:srgbClr val="3B3535"/>
                 </a:solidFill>
@@ -2269,70 +2929,20 @@
                 <a:ea typeface="Sora Light" pitchFamily="34" charset="-122"/>
                 <a:cs typeface="Sora Light" pitchFamily="34" charset="-120"/>
               </a:rPr>
-              <a:t>Wikipedia-grounded retrieval — because the questions are "according to Wikipedia", grounding the 8B reasoner in Wikipedia evidence (with cross-encoder reranking and an ensemble/confidence escalation) was the single biggest accuracy lever (+10 points over the model alone).</a:t>
-            </a:r>
-            <a:endParaRPr lang="en-US" sz="950" dirty="0"/>
-          </a:p>
-        </p:txBody>
-      </p:sp>
-      <p:sp>
-        <p:nvSpPr>
-          <p:cNvPr id="9" name="Shape 7"/>
-          <p:cNvSpPr/>
-          <p:nvPr/>
-        </p:nvSpPr>
-        <p:spPr>
-          <a:xfrm>
-            <a:off x="473943" y="3060055"/>
-            <a:ext cx="1273894" cy="233437"/>
-          </a:xfrm>
-          <a:prstGeom prst="roundRect">
-            <a:avLst>
-              <a:gd name="adj" fmla="val 18273"/>
-            </a:avLst>
-          </a:prstGeom>
-          <a:solidFill>
-            <a:srgbClr val="D5DCF6"/>
-          </a:solidFill>
-          <a:ln/>
-        </p:spPr>
-        <p:txBody>
-          <a:bodyPr/>
-          <a:lstStyle/>
-          <a:p>
-            <a:endParaRPr lang="en-US"/>
-          </a:p>
-        </p:txBody>
-      </p:sp>
-      <p:sp>
-        <p:nvSpPr>
-          <p:cNvPr id="10" name="Text 8"/>
-          <p:cNvSpPr/>
-          <p:nvPr/>
-        </p:nvSpPr>
-        <p:spPr>
-          <a:xfrm>
-            <a:off x="550069" y="3098081"/>
-            <a:ext cx="1578843" cy="157386"/>
-          </a:xfrm>
-          <a:prstGeom prst="rect">
-            <a:avLst/>
-          </a:prstGeom>
-          <a:noFill/>
-          <a:ln/>
-        </p:spPr>
-        <p:txBody>
-          <a:bodyPr wrap="none" lIns="0" tIns="0" rIns="0" bIns="0" rtlCol="0" anchor="t"/>
-          <a:lstStyle/>
-          <a:p>
-            <a:pPr marL="0" indent="0" algn="l">
-              <a:lnSpc>
-                <a:spcPct val="129000"/>
-              </a:lnSpc>
-              <a:buNone/>
-            </a:pPr>
-            <a:r>
-              <a:rPr lang="en-US" sz="750" dirty="0">
+              <a:t>No official answer key, so accuracy is a gold-set estimate</a:t>
+            </a:r>
+            <a:endParaRPr lang="en-US" sz="700" dirty="0"/>
+          </a:p>
+          <a:p>
+            <a:pPr marL="342900" indent="-342900" algn="l">
+              <a:lnSpc>
+                <a:spcPct val="113000"/>
+              </a:lnSpc>
+              <a:buSzPct val="100000"/>
+              <a:buChar char="•"/>
+            </a:pPr>
+            <a:r>
+              <a:rPr lang="en-US" sz="700" dirty="0">
                 <a:solidFill>
                   <a:srgbClr val="3B3535"/>
                 </a:solidFill>
@@ -2340,43 +2950,20 @@
                 <a:ea typeface="Sora Light" pitchFamily="34" charset="-122"/>
                 <a:cs typeface="Sora Light" pitchFamily="34" charset="-120"/>
               </a:rPr>
-              <a:t>KNOWN LIMITATIONS</a:t>
-            </a:r>
-            <a:endParaRPr lang="en-US" sz="750" dirty="0"/>
-          </a:p>
-        </p:txBody>
-      </p:sp>
-      <p:sp>
-        <p:nvSpPr>
-          <p:cNvPr id="11" name="Text 9"/>
-          <p:cNvSpPr/>
-          <p:nvPr/>
-        </p:nvSpPr>
-        <p:spPr>
-          <a:xfrm>
-            <a:off x="473943" y="3427363"/>
-            <a:ext cx="8196114" cy="590252"/>
-          </a:xfrm>
-          <a:prstGeom prst="rect">
-            <a:avLst/>
-          </a:prstGeom>
-          <a:noFill/>
-          <a:ln/>
-        </p:spPr>
-        <p:txBody>
-          <a:bodyPr wrap="square" lIns="0" tIns="0" rIns="0" bIns="0" rtlCol="0" anchor="t">
-            <a:normAutofit/>
-          </a:bodyPr>
-          <a:lstStyle/>
-          <a:p>
-            <a:pPr marL="0" indent="0" algn="l">
-              <a:lnSpc>
-                <a:spcPct val="129000"/>
-              </a:lnSpc>
-              <a:buNone/>
-            </a:pPr>
-            <a:r>
-              <a:rPr lang="en-US" sz="950" dirty="0">
+              <a:t>8 GB VRAM forces one-model-at-a-time staging</a:t>
+            </a:r>
+            <a:endParaRPr lang="en-US" sz="700" dirty="0"/>
+          </a:p>
+          <a:p>
+            <a:pPr marL="342900" indent="-342900" algn="l">
+              <a:lnSpc>
+                <a:spcPct val="113000"/>
+              </a:lnSpc>
+              <a:buSzPct val="100000"/>
+              <a:buChar char="•"/>
+            </a:pPr>
+            <a:r>
+              <a:rPr lang="en-US" sz="700" dirty="0">
                 <a:solidFill>
                   <a:srgbClr val="3B3535"/>
                 </a:solidFill>
@@ -2384,26 +2971,68 @@
                 <a:ea typeface="Sora Light" pitchFamily="34" charset="-122"/>
                 <a:cs typeface="Sora Light" pitchFamily="34" charset="-120"/>
               </a:rPr>
-              <a:t>No official key, so accuracy is a gold-set estimate; 8 GB VRAM forces one-model-at-a-time staging; DuckDuckGo can rate-limit (mitigated by caching — Wikipedia-first); Qwen3-8B sits at the 8B cap; five questions needed sourced manual verification, and Q79 is a genuinely flawed item answered Unknown.</a:t>
-            </a:r>
-            <a:endParaRPr lang="en-US" sz="950" dirty="0"/>
-          </a:p>
-        </p:txBody>
-      </p:sp>
-      <p:sp>
-        <p:nvSpPr>
-          <p:cNvPr id="12" name="Shape 10"/>
-          <p:cNvSpPr/>
-          <p:nvPr/>
-        </p:nvSpPr>
-        <p:spPr>
-          <a:xfrm>
-            <a:off x="473943" y="4151486"/>
-            <a:ext cx="472306" cy="242962"/>
+              <a:t>DuckDuckGo rate-limiting, mitigated by caching</a:t>
+            </a:r>
+            <a:endParaRPr lang="en-US" sz="700" dirty="0"/>
+          </a:p>
+          <a:p>
+            <a:pPr marL="342900" indent="-342900" algn="l">
+              <a:lnSpc>
+                <a:spcPct val="113000"/>
+              </a:lnSpc>
+              <a:buSzPct val="100000"/>
+              <a:buChar char="•"/>
+            </a:pPr>
+            <a:r>
+              <a:rPr lang="en-US" sz="700" dirty="0">
+                <a:solidFill>
+                  <a:srgbClr val="3B3535"/>
+                </a:solidFill>
+                <a:latin typeface="Sora Light" pitchFamily="34" charset="0"/>
+                <a:ea typeface="Sora Light" pitchFamily="34" charset="-122"/>
+                <a:cs typeface="Sora Light" pitchFamily="34" charset="-120"/>
+              </a:rPr>
+              <a:t>Qwen3-8B sits at the 8B cap</a:t>
+            </a:r>
+            <a:endParaRPr lang="en-US" sz="700" dirty="0"/>
+          </a:p>
+          <a:p>
+            <a:pPr marL="342900" indent="-342900" algn="l">
+              <a:lnSpc>
+                <a:spcPct val="113000"/>
+              </a:lnSpc>
+              <a:buSzPct val="100000"/>
+              <a:buChar char="•"/>
+            </a:pPr>
+            <a:r>
+              <a:rPr lang="en-US" sz="700" dirty="0">
+                <a:solidFill>
+                  <a:srgbClr val="3B3535"/>
+                </a:solidFill>
+                <a:latin typeface="Sora Light" pitchFamily="34" charset="0"/>
+                <a:ea typeface="Sora Light" pitchFamily="34" charset="-122"/>
+                <a:cs typeface="Sora Light" pitchFamily="34" charset="-120"/>
+              </a:rPr>
+              <a:t>5 questions needed manual verification; Q79 answered Unknown</a:t>
+            </a:r>
+            <a:endParaRPr lang="en-US" sz="700" dirty="0"/>
+          </a:p>
+        </p:txBody>
+      </p:sp>
+      <p:sp>
+        <p:nvSpPr>
+          <p:cNvPr id="22" name="Shape 19"/>
+          <p:cNvSpPr/>
+          <p:nvPr/>
+        </p:nvSpPr>
+        <p:spPr>
+          <a:xfrm>
+            <a:off x="1191071" y="4370115"/>
+            <a:ext cx="348779" cy="165869"/>
           </a:xfrm>
           <a:prstGeom prst="roundRect">
             <a:avLst>
-              <a:gd name="adj" fmla="val 17556"/>
+              <a:gd name="adj" fmla="val 18859"/>
             </a:avLst>
           </a:prstGeom>
           <a:noFill/>
@@ -2424,14 +3053,14 @@
       </p:sp>
       <p:sp>
         <p:nvSpPr>
-          <p:cNvPr id="13" name="Text 11"/>
-          <p:cNvSpPr/>
-          <p:nvPr/>
-        </p:nvSpPr>
-        <p:spPr>
-          <a:xfrm>
-            <a:off x="554831" y="4194274"/>
-            <a:ext cx="767730" cy="157386"/>
+          <p:cNvPr id="23" name="Text 20"/>
+          <p:cNvSpPr/>
+          <p:nvPr/>
+        </p:nvSpPr>
+        <p:spPr>
+          <a:xfrm>
+            <a:off x="1251645" y="4402782"/>
+            <a:ext cx="684833" cy="100533"/>
           </a:xfrm>
           <a:prstGeom prst="rect">
             <a:avLst/>
@@ -2445,12 +3074,12 @@
           <a:p>
             <a:pPr marL="0" indent="0" algn="l">
               <a:lnSpc>
-                <a:spcPct val="129000"/>
+                <a:spcPct val="113000"/>
               </a:lnSpc>
               <a:buNone/>
             </a:pPr>
             <a:r>
-              <a:rPr lang="en-US" sz="750" dirty="0">
+              <a:rPr lang="en-US" sz="550" dirty="0">
                 <a:solidFill>
                   <a:srgbClr val="1A2D7A"/>
                 </a:solidFill>
@@ -2460,20 +3089,20 @@
               </a:rPr>
               <a:t>CODE</a:t>
             </a:r>
-            <a:endParaRPr lang="en-US" sz="750" dirty="0"/>
-          </a:p>
-        </p:txBody>
-      </p:sp>
-      <p:sp>
-        <p:nvSpPr>
-          <p:cNvPr id="14" name="Text 12"/>
-          <p:cNvSpPr/>
-          <p:nvPr/>
-        </p:nvSpPr>
-        <p:spPr>
-          <a:xfrm>
-            <a:off x="473943" y="4528319"/>
-            <a:ext cx="8653314" cy="196751"/>
+            <a:endParaRPr lang="en-US" sz="550" dirty="0"/>
+          </a:p>
+        </p:txBody>
+      </p:sp>
+      <p:sp>
+        <p:nvSpPr>
+          <p:cNvPr id="24" name="Text 21"/>
+          <p:cNvSpPr/>
+          <p:nvPr/>
+        </p:nvSpPr>
+        <p:spPr>
+          <a:xfrm>
+            <a:off x="1191071" y="4607942"/>
+            <a:ext cx="7218983" cy="125611"/>
           </a:xfrm>
           <a:prstGeom prst="rect">
             <a:avLst/>
@@ -2487,19 +3116,19 @@
           <a:p>
             <a:pPr marL="0" indent="0" algn="l">
               <a:lnSpc>
-                <a:spcPct val="129000"/>
+                <a:spcPct val="113000"/>
               </a:lnSpc>
               <a:buNone/>
             </a:pPr>
             <a:r>
-              <a:rPr lang="en-US" sz="950" u="sng" dirty="0">
+              <a:rPr lang="en-US" sz="700" u="sng" dirty="0">
                 <a:solidFill>
                   <a:srgbClr val="1A2D7A"/>
                 </a:solidFill>
                 <a:latin typeface="Sora Light" pitchFamily="34" charset="0"/>
                 <a:ea typeface="Sora Light" pitchFamily="34" charset="-122"/>
                 <a:cs typeface="Sora Light" pitchFamily="34" charset="-120"/>
-                <a:hlinkClick r:id="rId3">
+                <a:hlinkClick r:id="rId4">
                   <a:extLst>
                     <a:ext uri="{A12FA001-AC4F-418D-AE19-62706E023703}">
                       <ahyp:hlinkClr xmlns:ahyp="http://schemas.microsoft.com/office/drawing/2018/hyperlinkcolor" val="tx"/>
@@ -2509,7 +3138,7 @@
               </a:rPr>
               <a:t>https://github.com/tejiri-code/BCU-AI-Hackathon-2026/tree/apexmind</a:t>
             </a:r>
-            <a:endParaRPr lang="en-US" sz="950" dirty="0"/>
+            <a:endParaRPr lang="en-US" sz="700" dirty="0"/>
           </a:p>
         </p:txBody>
       </p:sp>
